--- a/Presentation/Isekai_Fleche_Hackathon.pptx
+++ b/Presentation/Isekai_Fleche_Hackathon.pptx
@@ -22,6 +22,7 @@
     <p:sldId id="267" r:id="rId13"/>
     <p:sldId id="268" r:id="rId14"/>
     <p:sldId id="272" r:id="rId15"/>
+    <p:sldId id="275" r:id="rId22"/>
     <p:sldId id="274" r:id="rId16"/>
   </p:sldIdLst>
   <p:sldSz cx="12192000" cy="6858000"/>
@@ -8227,6 +8228,788 @@
   <p:clrMapOvr>
     <a:masterClrMapping/>
   </p:clrMapOvr>
+</p:sld>
+</file>
+
+<file path=ppt/slides/slide16.xml><?xml version="1.0" encoding="utf-8"?>
+<p:sld xmlns:a="http://schemas.openxmlformats.org/drawingml/2006/main" xmlns:r="http://schemas.openxmlformats.org/officeDocument/2006/relationships" xmlns:p="http://schemas.openxmlformats.org/presentationml/2006/main">
+  <p:cSld name="Upgrade Futuri">
+    <p:bg>
+      <p:bgPr>
+        <a:solidFill>
+          <a:srgbClr val="0D1714"/>
+        </a:solidFill>
+        <a:effectLst/>
+      </p:bgPr>
+    </p:bg>
+    <p:spTree>
+      <p:nvGrpSpPr>
+        <p:cNvPr id="1" name=""/>
+        <p:cNvGrpSpPr/>
+        <p:nvPr/>
+      </p:nvGrpSpPr>
+      <p:grpSpPr>
+        <a:xfrm>
+          <a:off x="0" y="0"/>
+          <a:ext cx="0" cy="0"/>
+          <a:chOff x="0" y="0"/>
+          <a:chExt cx="0" cy="0"/>
+        </a:xfrm>
+      </p:grpSpPr>
+      <p:sp>
+        <p:nvSpPr>
+          <p:cNvPr id="2" name="Label"/>
+          <p:cNvSpPr txBox="1"/>
+          <p:nvPr/>
+        </p:nvSpPr>
+        <p:spPr>
+          <a:xfrm>
+            <a:off x="566928" y="146304"/>
+            <a:ext cx="11073384" cy="237744"/>
+          </a:xfrm>
+          <a:prstGeom prst="rect">
+            <a:avLst/>
+          </a:prstGeom>
+          <a:noFill/>
+          <a:ln/>
+        </p:spPr>
+        <p:txBody>
+          <a:bodyPr wrap="square" lIns="0" tIns="0" rIns="0" bIns="0" rtlCol="0" anchor="t"/>
+          <a:lstStyle/>
+          <a:p>
+            <a:pPr marL="0" indent="0">
+              <a:buNone/>
+            </a:pPr>
+            <a:r>
+              <a:rPr lang="it-IT" sz="1050" b="1" kern="0" spc="200" dirty="0">
+                <a:solidFill>
+                  <a:srgbClr val="F0B429"/>
+                </a:solidFill>
+                <a:latin typeface="Calibri" pitchFamily="34" charset="0"/>
+              </a:rPr>
+              <a:t>PROSSIMI PASSI</a:t>
+            </a:r>
+          </a:p>
+        </p:txBody>
+      </p:sp>
+      <p:sp>
+        <p:nvSpPr>
+          <p:cNvPr id="3" name="Title"/>
+          <p:cNvSpPr txBox="1"/>
+          <p:nvPr/>
+        </p:nvSpPr>
+        <p:spPr>
+          <a:xfrm>
+            <a:off x="566928" y="384048"/>
+            <a:ext cx="11073384" cy="658368"/>
+          </a:xfrm>
+          <a:prstGeom prst="rect">
+            <a:avLst/>
+          </a:prstGeom>
+          <a:noFill/>
+          <a:ln/>
+        </p:spPr>
+        <p:txBody>
+          <a:bodyPr wrap="square" lIns="0" tIns="0" rIns="0" bIns="0" rtlCol="0" anchor="t"/>
+          <a:lstStyle/>
+          <a:p>
+            <a:pPr marL="0" indent="0">
+              <a:buNone/>
+            </a:pPr>
+            <a:r>
+              <a:rPr lang="it-IT" sz="3000" b="1" kern="0" dirty="0">
+                <a:solidFill>
+                  <a:srgbClr val="F4F1EA"/>
+                </a:solidFill>
+                <a:latin typeface="Cambria" pitchFamily="34" charset="0"/>
+              </a:rPr>
+              <a:t>Dove stiamo andando.</a:t>
+            </a:r>
+          </a:p>
+        </p:txBody>
+      </p:sp>
+      <p:sp>
+        <p:nvSpPr>
+          <p:cNvPr id="4" name="Card_4"/>
+          <p:cNvSpPr/>
+          <p:nvPr/>
+        </p:nvSpPr>
+        <p:spPr>
+          <a:xfrm>
+            <a:off x="566928" y="1335024"/>
+            <a:ext cx="5408676" cy="1920240"/>
+          </a:xfrm>
+          <a:prstGeom prst="roundRect">
+            <a:avLst>
+              <a:gd name="adj" fmla="val 3810"/>
+            </a:avLst>
+          </a:prstGeom>
+          <a:solidFill>
+            <a:srgbClr val="152420"/>
+          </a:solidFill>
+          <a:ln w="12700">
+            <a:solidFill>
+              <a:srgbClr val="2B453D"/>
+            </a:solidFill>
+            <a:prstDash val="solid"/>
+          </a:ln>
+        </p:spPr>
+        <p:txBody>
+          <a:bodyPr/>
+          <a:lstStyle/>
+          <a:p>
+            <a:endParaRPr lang="it-IT"/>
+          </a:p>
+        </p:txBody>
+      </p:sp>
+      <p:sp>
+        <p:nvSpPr>
+          <p:cNvPr id="5" name="CLabel_5"/>
+          <p:cNvSpPr txBox="1"/>
+          <p:nvPr/>
+        </p:nvSpPr>
+        <p:spPr>
+          <a:xfrm>
+            <a:off x="795528" y="1518024"/>
+            <a:ext cx="4951476" cy="270000"/>
+          </a:xfrm>
+          <a:prstGeom prst="rect">
+            <a:avLst/>
+          </a:prstGeom>
+          <a:noFill/>
+          <a:ln/>
+        </p:spPr>
+        <p:txBody>
+          <a:bodyPr wrap="square" lIns="0" tIns="0" rIns="0" bIns="0" rtlCol="0" anchor="t"/>
+          <a:lstStyle/>
+          <a:p>
+            <a:pPr marL="0" indent="0">
+              <a:buNone/>
+            </a:pPr>
+            <a:r>
+              <a:rPr lang="it-IT" sz="900" b="1" kern="0" spc="150" dirty="0">
+                <a:solidFill>
+                  <a:srgbClr val="F0B429"/>
+                </a:solidFill>
+                <a:latin typeface="Calibri" pitchFamily="34" charset="0"/>
+              </a:rPr>
+              <a:t>CLOUD E CROSS-DEVICE</a:t>
+            </a:r>
+          </a:p>
+        </p:txBody>
+      </p:sp>
+      <p:sp>
+        <p:nvSpPr>
+          <p:cNvPr id="6" name="CTitle_6"/>
+          <p:cNvSpPr txBox="1"/>
+          <p:nvPr/>
+        </p:nvSpPr>
+        <p:spPr>
+          <a:xfrm>
+            <a:off x="795528" y="1825024"/>
+            <a:ext cx="4951476" cy="500000"/>
+          </a:xfrm>
+          <a:prstGeom prst="rect">
+            <a:avLst/>
+          </a:prstGeom>
+          <a:noFill/>
+          <a:ln/>
+        </p:spPr>
+        <p:txBody>
+          <a:bodyPr wrap="square" lIns="0" tIns="0" rIns="0" bIns="0" rtlCol="0" anchor="t"/>
+          <a:lstStyle/>
+          <a:p>
+            <a:pPr marL="0" indent="0">
+              <a:buNone/>
+            </a:pPr>
+            <a:r>
+              <a:rPr lang="it-IT" sz="2000" b="1" kern="0" dirty="0">
+                <a:solidFill>
+                  <a:srgbClr val="F4F1EA"/>
+                </a:solidFill>
+                <a:latin typeface="Cambria" pitchFamily="34" charset="0"/>
+              </a:rPr>
+              <a:t>Server in cloud</a:t>
+            </a:r>
+          </a:p>
+        </p:txBody>
+      </p:sp>
+      <p:sp>
+        <p:nvSpPr>
+          <p:cNvPr id="7" name="CDesc_7"/>
+          <p:cNvSpPr txBox="1"/>
+          <p:nvPr/>
+        </p:nvSpPr>
+        <p:spPr>
+          <a:xfrm>
+            <a:off x="795528" y="2355024"/>
+            <a:ext cx="4951476" cy="780000"/>
+          </a:xfrm>
+          <a:prstGeom prst="rect">
+            <a:avLst/>
+          </a:prstGeom>
+          <a:noFill/>
+          <a:ln/>
+        </p:spPr>
+        <p:txBody>
+          <a:bodyPr wrap="square" lIns="0" tIns="0" rIns="0" bIns="0" rtlCol="0" anchor="t"/>
+          <a:lstStyle/>
+          <a:p>
+            <a:pPr marL="0" indent="0">
+              <a:buNone/>
+            </a:pPr>
+            <a:r>
+              <a:rPr lang="it-IT" sz="1000" kern="0" dirty="0">
+                <a:solidFill>
+                  <a:srgbClr val="93ADA4"/>
+                </a:solidFill>
+                <a:latin typeface="Calibri" pitchFamily="34" charset="0"/>
+              </a:rPr>
+              <a:t>Archiviazione dei dati su server cloud.</a:t>
+            </a:r>
+          </a:p>
+          <a:p>
+            <a:pPr marL="0" indent="0">
+              <a:buNone/>
+            </a:pPr>
+            <a:r>
+              <a:rPr lang="it-IT" sz="1000" kern="0" dirty="0">
+                <a:solidFill>
+                  <a:srgbClr val="93ADA4"/>
+                </a:solidFill>
+                <a:latin typeface="Calibri" pitchFamily="34" charset="0"/>
+              </a:rPr>
+              <a:t>Accesso sincronizzato da qualsiasi dispositivo.</a:t>
+            </a:r>
+          </a:p>
+          <a:p>
+            <a:pPr marL="0" indent="0">
+              <a:buNone/>
+            </a:pPr>
+            <a:r>
+              <a:rPr lang="it-IT" sz="1000" kern="0" dirty="0">
+                <a:solidFill>
+                  <a:srgbClr val="93ADA4"/>
+                </a:solidFill>
+                <a:latin typeface="Calibri" pitchFamily="34" charset="0"/>
+              </a:rPr>
+              <a:t>Nessun dato perso al cambio di telefono.</a:t>
+            </a:r>
+          </a:p>
+        </p:txBody>
+      </p:sp>
+      <p:sp>
+        <p:nvSpPr>
+          <p:cNvPr id="8" name="Card_8"/>
+          <p:cNvSpPr/>
+          <p:nvPr/>
+        </p:nvSpPr>
+        <p:spPr>
+          <a:xfrm>
+            <a:off x="6231636" y="1335024"/>
+            <a:ext cx="5408676" cy="1920240"/>
+          </a:xfrm>
+          <a:prstGeom prst="roundRect">
+            <a:avLst>
+              <a:gd name="adj" fmla="val 3810"/>
+            </a:avLst>
+          </a:prstGeom>
+          <a:solidFill>
+            <a:srgbClr val="152420"/>
+          </a:solidFill>
+          <a:ln w="12700">
+            <a:solidFill>
+              <a:srgbClr val="2B453D"/>
+            </a:solidFill>
+            <a:prstDash val="solid"/>
+          </a:ln>
+        </p:spPr>
+        <p:txBody>
+          <a:bodyPr/>
+          <a:lstStyle/>
+          <a:p>
+            <a:endParaRPr lang="it-IT"/>
+          </a:p>
+        </p:txBody>
+      </p:sp>
+      <p:sp>
+        <p:nvSpPr>
+          <p:cNvPr id="9" name="CLabel_9"/>
+          <p:cNvSpPr txBox="1"/>
+          <p:nvPr/>
+        </p:nvSpPr>
+        <p:spPr>
+          <a:xfrm>
+            <a:off x="6460236" y="1518024"/>
+            <a:ext cx="4951476" cy="270000"/>
+          </a:xfrm>
+          <a:prstGeom prst="rect">
+            <a:avLst/>
+          </a:prstGeom>
+          <a:noFill/>
+          <a:ln/>
+        </p:spPr>
+        <p:txBody>
+          <a:bodyPr wrap="square" lIns="0" tIns="0" rIns="0" bIns="0" rtlCol="0" anchor="t"/>
+          <a:lstStyle/>
+          <a:p>
+            <a:pPr marL="0" indent="0">
+              <a:buNone/>
+            </a:pPr>
+            <a:r>
+              <a:rPr lang="it-IT" sz="900" b="1" kern="0" spc="150" dirty="0">
+                <a:solidFill>
+                  <a:srgbClr val="F0B429"/>
+                </a:solidFill>
+                <a:latin typeface="Calibri" pitchFamily="34" charset="0"/>
+              </a:rPr>
+              <a:t>SICUREZZA</a:t>
+            </a:r>
+          </a:p>
+        </p:txBody>
+      </p:sp>
+      <p:sp>
+        <p:nvSpPr>
+          <p:cNvPr id="10" name="CTitle_10"/>
+          <p:cNvSpPr txBox="1"/>
+          <p:nvPr/>
+        </p:nvSpPr>
+        <p:spPr>
+          <a:xfrm>
+            <a:off x="6460236" y="1825024"/>
+            <a:ext cx="4951476" cy="500000"/>
+          </a:xfrm>
+          <a:prstGeom prst="rect">
+            <a:avLst/>
+          </a:prstGeom>
+          <a:noFill/>
+          <a:ln/>
+        </p:spPr>
+        <p:txBody>
+          <a:bodyPr wrap="square" lIns="0" tIns="0" rIns="0" bIns="0" rtlCol="0" anchor="t"/>
+          <a:lstStyle/>
+          <a:p>
+            <a:pPr marL="0" indent="0">
+              <a:buNone/>
+            </a:pPr>
+            <a:r>
+              <a:rPr lang="it-IT" sz="2000" b="1" kern="0" dirty="0">
+                <a:solidFill>
+                  <a:srgbClr val="F4F1EA"/>
+                </a:solidFill>
+                <a:latin typeface="Cambria" pitchFamily="34" charset="0"/>
+              </a:rPr>
+              <a:t>Crittografia end-to-end</a:t>
+            </a:r>
+          </a:p>
+        </p:txBody>
+      </p:sp>
+      <p:sp>
+        <p:nvSpPr>
+          <p:cNvPr id="11" name="CDesc_11"/>
+          <p:cNvSpPr txBox="1"/>
+          <p:nvPr/>
+        </p:nvSpPr>
+        <p:spPr>
+          <a:xfrm>
+            <a:off x="6460236" y="2355024"/>
+            <a:ext cx="4951476" cy="780000"/>
+          </a:xfrm>
+          <a:prstGeom prst="rect">
+            <a:avLst/>
+          </a:prstGeom>
+          <a:noFill/>
+          <a:ln/>
+        </p:spPr>
+        <p:txBody>
+          <a:bodyPr wrap="square" lIns="0" tIns="0" rIns="0" bIns="0" rtlCol="0" anchor="t"/>
+          <a:lstStyle/>
+          <a:p>
+            <a:pPr marL="0" indent="0">
+              <a:buNone/>
+            </a:pPr>
+            <a:r>
+              <a:rPr lang="it-IT" sz="1000" kern="0" dirty="0">
+                <a:solidFill>
+                  <a:srgbClr val="93ADA4"/>
+                </a:solidFill>
+                <a:latin typeface="Calibri" pitchFamily="34" charset="0"/>
+              </a:rPr>
+              <a:t>Dati del cliente protetti con crittografia.</a:t>
+            </a:r>
+          </a:p>
+          <a:p>
+            <a:pPr marL="0" indent="0">
+              <a:buNone/>
+            </a:pPr>
+            <a:r>
+              <a:rPr lang="it-IT" sz="1000" kern="0" dirty="0">
+                <a:solidFill>
+                  <a:srgbClr val="93ADA4"/>
+                </a:solidFill>
+                <a:latin typeface="Calibri" pitchFamily="34" charset="0"/>
+              </a:rPr>
+              <a:t>Nessuna informazione sensibile in chiaro.</a:t>
+            </a:r>
+          </a:p>
+          <a:p>
+            <a:pPr marL="0" indent="0">
+              <a:buNone/>
+            </a:pPr>
+            <a:r>
+              <a:rPr lang="it-IT" sz="1000" kern="0" dirty="0">
+                <a:solidFill>
+                  <a:srgbClr val="93ADA4"/>
+                </a:solidFill>
+                <a:latin typeface="Calibri" pitchFamily="34" charset="0"/>
+              </a:rPr>
+              <a:t>Accesso riservato esclusivamente all'utente.</a:t>
+            </a:r>
+          </a:p>
+        </p:txBody>
+      </p:sp>
+      <p:sp>
+        <p:nvSpPr>
+          <p:cNvPr id="12" name="Card_12"/>
+          <p:cNvSpPr/>
+          <p:nvPr/>
+        </p:nvSpPr>
+        <p:spPr>
+          <a:xfrm>
+            <a:off x="566928" y="3493008"/>
+            <a:ext cx="5408676" cy="1920240"/>
+          </a:xfrm>
+          <a:prstGeom prst="roundRect">
+            <a:avLst>
+              <a:gd name="adj" fmla="val 3810"/>
+            </a:avLst>
+          </a:prstGeom>
+          <a:solidFill>
+            <a:srgbClr val="152420"/>
+          </a:solidFill>
+          <a:ln w="12700">
+            <a:solidFill>
+              <a:srgbClr val="2B453D"/>
+            </a:solidFill>
+            <a:prstDash val="solid"/>
+          </a:ln>
+        </p:spPr>
+        <p:txBody>
+          <a:bodyPr/>
+          <a:lstStyle/>
+          <a:p>
+            <a:endParaRPr lang="it-IT"/>
+          </a:p>
+        </p:txBody>
+      </p:sp>
+      <p:sp>
+        <p:nvSpPr>
+          <p:cNvPr id="13" name="CLabel_13"/>
+          <p:cNvSpPr txBox="1"/>
+          <p:nvPr/>
+        </p:nvSpPr>
+        <p:spPr>
+          <a:xfrm>
+            <a:off x="795528" y="3676008"/>
+            <a:ext cx="4951476" cy="270000"/>
+          </a:xfrm>
+          <a:prstGeom prst="rect">
+            <a:avLst/>
+          </a:prstGeom>
+          <a:noFill/>
+          <a:ln/>
+        </p:spPr>
+        <p:txBody>
+          <a:bodyPr wrap="square" lIns="0" tIns="0" rIns="0" bIns="0" rtlCol="0" anchor="t"/>
+          <a:lstStyle/>
+          <a:p>
+            <a:pPr marL="0" indent="0">
+              <a:buNone/>
+            </a:pPr>
+            <a:r>
+              <a:rPr lang="it-IT" sz="900" b="1" kern="0" spc="150" dirty="0">
+                <a:solidFill>
+                  <a:srgbClr val="F0B429"/>
+                </a:solidFill>
+                <a:latin typeface="Calibri" pitchFamily="34" charset="0"/>
+              </a:rPr>
+              <a:t>PORTAFOGLIO</a:t>
+            </a:r>
+          </a:p>
+        </p:txBody>
+      </p:sp>
+      <p:sp>
+        <p:nvSpPr>
+          <p:cNvPr id="14" name="CTitle_14"/>
+          <p:cNvSpPr txBox="1"/>
+          <p:nvPr/>
+        </p:nvSpPr>
+        <p:spPr>
+          <a:xfrm>
+            <a:off x="795528" y="3983008"/>
+            <a:ext cx="4951476" cy="500000"/>
+          </a:xfrm>
+          <a:prstGeom prst="rect">
+            <a:avLst/>
+          </a:prstGeom>
+          <a:noFill/>
+          <a:ln/>
+        </p:spPr>
+        <p:txBody>
+          <a:bodyPr wrap="square" lIns="0" tIns="0" rIns="0" bIns="0" rtlCol="0" anchor="t"/>
+          <a:lstStyle/>
+          <a:p>
+            <a:pPr marL="0" indent="0">
+              <a:buNone/>
+            </a:pPr>
+            <a:r>
+              <a:rPr lang="it-IT" sz="2000" b="1" kern="0" dirty="0">
+                <a:solidFill>
+                  <a:srgbClr val="F4F1EA"/>
+                </a:solidFill>
+                <a:latin typeface="Cambria" pitchFamily="34" charset="0"/>
+              </a:rPr>
+              <a:t>Tracciamento investimenti</a:t>
+            </a:r>
+          </a:p>
+        </p:txBody>
+      </p:sp>
+      <p:sp>
+        <p:nvSpPr>
+          <p:cNvPr id="15" name="CDesc_15"/>
+          <p:cNvSpPr txBox="1"/>
+          <p:nvPr/>
+        </p:nvSpPr>
+        <p:spPr>
+          <a:xfrm>
+            <a:off x="795528" y="4513008"/>
+            <a:ext cx="4951476" cy="780000"/>
+          </a:xfrm>
+          <a:prstGeom prst="rect">
+            <a:avLst/>
+          </a:prstGeom>
+          <a:noFill/>
+          <a:ln/>
+        </p:spPr>
+        <p:txBody>
+          <a:bodyPr wrap="square" lIns="0" tIns="0" rIns="0" bIns="0" rtlCol="0" anchor="t"/>
+          <a:lstStyle/>
+          <a:p>
+            <a:pPr marL="0" indent="0">
+              <a:buNone/>
+            </a:pPr>
+            <a:r>
+              <a:rPr lang="it-IT" sz="1000" kern="0" dirty="0">
+                <a:solidFill>
+                  <a:srgbClr val="93ADA4"/>
+                </a:solidFill>
+                <a:latin typeface="Calibri" pitchFamily="34" charset="0"/>
+              </a:rPr>
+              <a:t>Monitoraggio del portafoglio personale.</a:t>
+            </a:r>
+          </a:p>
+          <a:p>
+            <a:pPr marL="0" indent="0">
+              <a:buNone/>
+            </a:pPr>
+            <a:r>
+              <a:rPr lang="it-IT" sz="1000" kern="0" dirty="0">
+                <a:solidFill>
+                  <a:srgbClr val="93ADA4"/>
+                </a:solidFill>
+                <a:latin typeface="Calibri" pitchFamily="34" charset="0"/>
+              </a:rPr>
+              <a:t>Visibilita' sugli strumenti di investimento.</a:t>
+            </a:r>
+          </a:p>
+          <a:p>
+            <a:pPr marL="0" indent="0">
+              <a:buNone/>
+            </a:pPr>
+            <a:r>
+              <a:rPr lang="it-IT" sz="1000" kern="0" dirty="0">
+                <a:solidFill>
+                  <a:srgbClr val="93ADA4"/>
+                </a:solidFill>
+                <a:latin typeface="Calibri" pitchFamily="34" charset="0"/>
+              </a:rPr>
+              <a:t>Storico delle posizioni aperte e chiuse.</a:t>
+            </a:r>
+          </a:p>
+        </p:txBody>
+      </p:sp>
+      <p:sp>
+        <p:nvSpPr>
+          <p:cNvPr id="16" name="Card_16"/>
+          <p:cNvSpPr/>
+          <p:nvPr/>
+        </p:nvSpPr>
+        <p:spPr>
+          <a:xfrm>
+            <a:off x="6231636" y="3493008"/>
+            <a:ext cx="5408676" cy="1920240"/>
+          </a:xfrm>
+          <a:prstGeom prst="roundRect">
+            <a:avLst>
+              <a:gd name="adj" fmla="val 3810"/>
+            </a:avLst>
+          </a:prstGeom>
+          <a:solidFill>
+            <a:srgbClr val="152420"/>
+          </a:solidFill>
+          <a:ln w="12700">
+            <a:solidFill>
+              <a:srgbClr val="2B453D"/>
+            </a:solidFill>
+            <a:prstDash val="solid"/>
+          </a:ln>
+        </p:spPr>
+        <p:txBody>
+          <a:bodyPr/>
+          <a:lstStyle/>
+          <a:p>
+            <a:endParaRPr lang="it-IT"/>
+          </a:p>
+        </p:txBody>
+      </p:sp>
+      <p:sp>
+        <p:nvSpPr>
+          <p:cNvPr id="17" name="CLabel_17"/>
+          <p:cNvSpPr txBox="1"/>
+          <p:nvPr/>
+        </p:nvSpPr>
+        <p:spPr>
+          <a:xfrm>
+            <a:off x="6460236" y="3676008"/>
+            <a:ext cx="4951476" cy="270000"/>
+          </a:xfrm>
+          <a:prstGeom prst="rect">
+            <a:avLst/>
+          </a:prstGeom>
+          <a:noFill/>
+          <a:ln/>
+        </p:spPr>
+        <p:txBody>
+          <a:bodyPr wrap="square" lIns="0" tIns="0" rIns="0" bIns="0" rtlCol="0" anchor="t"/>
+          <a:lstStyle/>
+          <a:p>
+            <a:pPr marL="0" indent="0">
+              <a:buNone/>
+            </a:pPr>
+            <a:r>
+              <a:rPr lang="it-IT" sz="900" b="1" kern="0" spc="150" dirty="0">
+                <a:solidFill>
+                  <a:srgbClr val="F0B429"/>
+                </a:solidFill>
+                <a:latin typeface="Calibri" pitchFamily="34" charset="0"/>
+              </a:rPr>
+              <a:t>PREZZI IN TEMPO REALE</a:t>
+            </a:r>
+          </a:p>
+        </p:txBody>
+      </p:sp>
+      <p:sp>
+        <p:nvSpPr>
+          <p:cNvPr id="18" name="CTitle_18"/>
+          <p:cNvSpPr txBox="1"/>
+          <p:nvPr/>
+        </p:nvSpPr>
+        <p:spPr>
+          <a:xfrm>
+            <a:off x="6460236" y="3983008"/>
+            <a:ext cx="4951476" cy="500000"/>
+          </a:xfrm>
+          <a:prstGeom prst="rect">
+            <a:avLst/>
+          </a:prstGeom>
+          <a:noFill/>
+          <a:ln/>
+        </p:spPr>
+        <p:txBody>
+          <a:bodyPr wrap="square" lIns="0" tIns="0" rIns="0" bIns="0" rtlCol="0" anchor="t"/>
+          <a:lstStyle/>
+          <a:p>
+            <a:pPr marL="0" indent="0">
+              <a:buNone/>
+            </a:pPr>
+            <a:r>
+              <a:rPr lang="it-IT" sz="2000" b="1" kern="0" dirty="0">
+                <a:solidFill>
+                  <a:srgbClr val="F4F1EA"/>
+                </a:solidFill>
+                <a:latin typeface="Cambria" pitchFamily="34" charset="0"/>
+              </a:rPr>
+              <a:t>ETF ed ETC aggiornati</a:t>
+            </a:r>
+          </a:p>
+        </p:txBody>
+      </p:sp>
+      <p:sp>
+        <p:nvSpPr>
+          <p:cNvPr id="19" name="CDesc_19"/>
+          <p:cNvSpPr txBox="1"/>
+          <p:nvPr/>
+        </p:nvSpPr>
+        <p:spPr>
+          <a:xfrm>
+            <a:off x="6460236" y="4513008"/>
+            <a:ext cx="4951476" cy="780000"/>
+          </a:xfrm>
+          <a:prstGeom prst="rect">
+            <a:avLst/>
+          </a:prstGeom>
+          <a:noFill/>
+          <a:ln/>
+        </p:spPr>
+        <p:txBody>
+          <a:bodyPr wrap="square" lIns="0" tIns="0" rIns="0" bIns="0" rtlCol="0" anchor="t"/>
+          <a:lstStyle/>
+          <a:p>
+            <a:pPr marL="0" indent="0">
+              <a:buNone/>
+            </a:pPr>
+            <a:r>
+              <a:rPr lang="it-IT" sz="1000" kern="0" dirty="0">
+                <a:solidFill>
+                  <a:srgbClr val="93ADA4"/>
+                </a:solidFill>
+                <a:latin typeface="Calibri" pitchFamily="34" charset="0"/>
+              </a:rPr>
+              <a:t>Aggiornamento automatico dei prezzi.</a:t>
+            </a:r>
+          </a:p>
+          <a:p>
+            <a:pPr marL="0" indent="0">
+              <a:buNone/>
+            </a:pPr>
+            <a:r>
+              <a:rPr lang="it-IT" sz="1000" kern="0" dirty="0">
+                <a:solidFill>
+                  <a:srgbClr val="93ADA4"/>
+                </a:solidFill>
+                <a:latin typeface="Calibri" pitchFamily="34" charset="0"/>
+              </a:rPr>
+              <a:t>Copertura di ETF, ETC e altri strumenti.</a:t>
+            </a:r>
+          </a:p>
+          <a:p>
+            <a:pPr marL="0" indent="0">
+              <a:buNone/>
+            </a:pPr>
+            <a:r>
+              <a:rPr lang="it-IT" sz="1000" kern="0" dirty="0">
+                <a:solidFill>
+                  <a:srgbClr val="93ADA4"/>
+                </a:solidFill>
+                <a:latin typeface="Calibri" pitchFamily="34" charset="0"/>
+              </a:rPr>
+              <a:t>Dati sempre attuali per calcoli accurati.</a:t>
+            </a:r>
+          </a:p>
+        </p:txBody>
+      </p:sp>
+    </p:spTree>
+  </p:cSld>
 </p:sld>
 </file>
 
